--- a/assets/pptx/catalog-661.pptx
+++ b/assets/pptx/catalog-661.pptx
@@ -3283,7 +3283,7 @@
                 <a:ea typeface="Ebrima"/>
                 <a:cs typeface="Ebrima"/>
               </a:rPr>
-              <a:t>ከሰማሁት በላይ ነው ከገመትኩት (2x)</a:t>
+              <a:t>ከሰማሁት በላይ ነው ከገመትኩት 2x</a:t>
             </a:r>
           </a:p>
         </p:txBody>
@@ -3350,7 +3350,7 @@
                 <a:ea typeface="Ebrima"/>
                 <a:cs typeface="Ebrima"/>
               </a:rPr>
-              <a:t>አምላኬ (3x) እያልኩኝ</a:t>
+              <a:t>አምላኬ 3x እያልኩኝ</a:t>
             </a:r>
           </a:p>
           <a:p>
@@ -3386,7 +3386,7 @@
                 <a:ea typeface="Ebrima"/>
                 <a:cs typeface="Ebrima"/>
               </a:rPr>
-              <a:t>ቃላት አላገኝም ክብርህን የሚገልጥ (2x)</a:t>
+              <a:t>ቃላት አላገኝም ክብርህን የሚገልጥ 2x</a:t>
             </a:r>
           </a:p>
         </p:txBody>
@@ -3471,7 +3471,7 @@
                 <a:ea typeface="Ebrima"/>
                 <a:cs typeface="Ebrima"/>
               </a:rPr>
-              <a:t>ከሰማሁት በላይ ነው ከገመትኩት (2x)</a:t>
+              <a:t>ከሰማሁት በላይ ነው ከገመትኩት 2x</a:t>
             </a:r>
           </a:p>
         </p:txBody>
@@ -3592,7 +3592,7 @@
                 <a:ea typeface="Ebrima"/>
                 <a:cs typeface="Ebrima"/>
               </a:rPr>
-              <a:t>ቆጥሬ አልጨርስም ጌታ የአንተን ደግነት (2x)</a:t>
+              <a:t>ቆጥሬ አልጨርስም ጌታ የአንተን ደግነት 2x</a:t>
             </a:r>
           </a:p>
         </p:txBody>
@@ -3677,7 +3677,7 @@
                 <a:ea typeface="Ebrima"/>
                 <a:cs typeface="Ebrima"/>
               </a:rPr>
-              <a:t>ከሰማሁት በላይ ነው ከገመትኩት (2x)</a:t>
+              <a:t>ከሰማሁት በላይ ነው ከገመትኩት 2x</a:t>
             </a:r>
           </a:p>
         </p:txBody>
@@ -3883,7 +3883,7 @@
                 <a:ea typeface="Ebrima"/>
                 <a:cs typeface="Ebrima"/>
               </a:rPr>
-              <a:t>ከሰማሁት በላይ ነው ከገመትኩት (2x)</a:t>
+              <a:t>ከሰማሁት በላይ ነው ከገመትኩት 2x</a:t>
             </a:r>
           </a:p>
         </p:txBody>
